--- a/videos/machine-learning/03_ridger_regression_gradient_descent/recreated_pptx/slide_017_recreated.pptx
+++ b/videos/machine-learning/03_ridger_regression_gradient_descent/recreated_pptx/slide_017_recreated.pptx
@@ -13371,7 +13371,7 @@
       </p:sp>
       <p:pic>
         <p:nvPicPr>
-          <p:cNvPr id="44" name="Image 0" descr="/workspaces/codespaces-blank/ai_llm_slides/videos/machine-learning/03_ridger_regression_gradient_descent/recreated_pptx/build/assets/wbox017_band1.png">    </p:cNvPr>
+          <p:cNvPr id="44" name="Image 0" descr="/home/ahmed/Projects/ai_llm_slides/videos/machine-learning/03_ridger_regression_gradient_descent/recreated_pptx/build/assets/wbox017_band1.png">    </p:cNvPr>
           <p:cNvPicPr>
             <a:picLocks noChangeAspect="1"/>
           </p:cNvPicPr>
@@ -13420,7 +13420,7 @@
       </p:sp>
       <p:pic>
         <p:nvPicPr>
-          <p:cNvPr id="46" name="Image 1" descr="/workspaces/codespaces-blank/ai_llm_slides/videos/machine-learning/03_ridger_regression_gradient_descent/recreated_pptx/build/assets/wbox017_band2.png">    </p:cNvPr>
+          <p:cNvPr id="46" name="Image 1" descr="/home/ahmed/Projects/ai_llm_slides/videos/machine-learning/03_ridger_regression_gradient_descent/recreated_pptx/build/assets/wbox017_band2.png">    </p:cNvPr>
           <p:cNvPicPr>
             <a:picLocks noChangeAspect="1"/>
           </p:cNvPicPr>
@@ -13469,7 +13469,7 @@
       </p:sp>
       <p:pic>
         <p:nvPicPr>
-          <p:cNvPr id="48" name="Image 2" descr="/workspaces/codespaces-blank/ai_llm_slides/videos/machine-learning/03_ridger_regression_gradient_descent/recreated_pptx/build/assets/wbox017_band3.png">    </p:cNvPr>
+          <p:cNvPr id="48" name="Image 2" descr="/home/ahmed/Projects/ai_llm_slides/videos/machine-learning/03_ridger_regression_gradient_descent/recreated_pptx/build/assets/wbox017_band3.png">    </p:cNvPr>
           <p:cNvPicPr>
             <a:picLocks noChangeAspect="1"/>
           </p:cNvPicPr>
